--- a/Tests/RostrumTests/Fixtures/AuthorDependencyImport/ModernCustomXML.pptx
+++ b/Tests/RostrumTests/Fixtures/AuthorDependencyImport/ModernCustomXML.pptx
@@ -16,7 +16,7 @@
 
 <file path=ppt/authors.xml><?xml version="1.0" encoding="utf-8"?>
 <p188:authorLst xmlns:a="http://schemas.openxmlformats.org/drawingml/2006/main" xmlns:p188="http://schemas.microsoft.com/office/powerpoint/2018/8/main" xmlns:r="http://schemas.openxmlformats.org/officeDocument/2006/relationships">
-  <p188:author xmlns="" xmlns:a="http://schemas.openxmlformats.org/drawingml/2006/main" xmlns:p188="http://schemas.microsoft.com/office/powerpoint/2018/8/main" xmlns:r="http://schemas.openxmlformats.org/officeDocument/2006/relationships" id="{75A6D56D-4FA6-2A4A-71B9-BD29688AA2F6}" initials="jlw" name="Jay Welshofer" providerId="None" userId="Jay Welshofer">
+  <p188:author xmlns="" xmlns:a="http://schemas.openxmlformats.org/drawingml/2006/main" xmlns:p188="http://schemas.microsoft.com/office/powerpoint/2018/8/main" xmlns:r="http://schemas.openxmlformats.org/officeDocument/2006/relationships" id="{75A6D56D-4FA6-2A4A-71B9-BD29688AA2F6}" initials="FA" name="Fixture Author" providerId="None" userId="Fixture Author">
     <p188:extLst>
       <p:ext xmlns:p="http://schemas.openxmlformats.org/presentationml/2006/main" uri="urn:rel3-oracle">
         <custom:payload xmlns:custom="urn:rel3-oracle" xmlns:rel="http://schemas.openxmlformats.org/officeDocument/2006/relationships" rel:id="rId1"/>
